--- a/Lesson.09 - Concurrency/Concurrency.pptx
+++ b/Lesson.09 - Concurrency/Concurrency.pptx
@@ -5,10 +5,10 @@
     <p:sldMasterId id="2147483648" r:id="rId1"/>
   </p:sldMasterIdLst>
   <p:notesMasterIdLst>
-    <p:notesMasterId r:id="rId17"/>
+    <p:notesMasterId r:id="rId18"/>
   </p:notesMasterIdLst>
   <p:handoutMasterIdLst>
-    <p:handoutMasterId r:id="rId18"/>
+    <p:handoutMasterId r:id="rId19"/>
   </p:handoutMasterIdLst>
   <p:sldIdLst>
     <p:sldId id="256" r:id="rId2"/>
@@ -26,6 +26,7 @@
     <p:sldId id="267" r:id="rId14"/>
     <p:sldId id="268" r:id="rId15"/>
     <p:sldId id="269" r:id="rId16"/>
+    <p:sldId id="271" r:id="rId17"/>
   </p:sldIdLst>
   <p:sldSz cx="12192000" cy="6858000"/>
   <p:notesSz cx="6858000" cy="9144000"/>
@@ -246,7 +247,7 @@
           <a:p>
             <a:fld id="{14042657-6240-B14B-9F48-F865CB79AC7C}" type="datetimeFigureOut">
               <a:rPr lang="en-US" smtClean="0"/>
-              <a:t>12/2/25</a:t>
+              <a:t>12/9/25</a:t>
             </a:fld>
             <a:endParaRPr lang="en-US"/>
           </a:p>
@@ -430,7 +431,7 @@
           <a:p>
             <a:fld id="{5E6B121A-761B-2742-9D61-65348EACD743}" type="datetimeFigureOut">
               <a:rPr lang="en-US" smtClean="0"/>
-              <a:t>12/2/25</a:t>
+              <a:t>12/9/25</a:t>
             </a:fld>
             <a:endParaRPr lang="en-US"/>
           </a:p>
@@ -847,7 +848,7 @@
           <a:lstStyle/>
           <a:p>
             <a:fld id="{0A2D9770-F4DB-5A46-8A49-C16D1902D38D}" type="datetime1">
-              <a:t>12/2/25</a:t>
+              <a:t>12/9/25</a:t>
             </a:fld>
             <a:endParaRPr lang="en-US"/>
           </a:p>
@@ -1047,7 +1048,7 @@
           <a:lstStyle/>
           <a:p>
             <a:fld id="{12B65F8A-9164-4C4B-B78B-A266D999FBA9}" type="datetime1">
-              <a:t>12/2/25</a:t>
+              <a:t>12/9/25</a:t>
             </a:fld>
             <a:endParaRPr lang="en-US"/>
           </a:p>
@@ -1257,7 +1258,7 @@
           <a:lstStyle/>
           <a:p>
             <a:fld id="{E421AE3B-8055-3B43-BD4F-85DF2A40E3D4}" type="datetime1">
-              <a:t>12/2/25</a:t>
+              <a:t>12/9/25</a:t>
             </a:fld>
             <a:endParaRPr lang="en-US"/>
           </a:p>
@@ -1457,7 +1458,7 @@
           <a:lstStyle/>
           <a:p>
             <a:fld id="{4590FD28-9746-8F4F-8DBB-904BA8BDED9E}" type="datetime1">
-              <a:t>12/2/25</a:t>
+              <a:t>12/9/25</a:t>
             </a:fld>
             <a:endParaRPr lang="en-US"/>
           </a:p>
@@ -1734,7 +1735,7 @@
           <a:lstStyle/>
           <a:p>
             <a:fld id="{FEE08BFA-2FC9-9F49-ADA6-907F4DDB8143}" type="datetime1">
-              <a:t>12/2/25</a:t>
+              <a:t>12/9/25</a:t>
             </a:fld>
             <a:endParaRPr lang="en-US"/>
           </a:p>
@@ -2001,7 +2002,7 @@
           <a:lstStyle/>
           <a:p>
             <a:fld id="{97524B08-C44F-AB4E-AC37-0721AFA65C93}" type="datetime1">
-              <a:t>12/2/25</a:t>
+              <a:t>12/9/25</a:t>
             </a:fld>
             <a:endParaRPr lang="en-US"/>
           </a:p>
@@ -2415,7 +2416,7 @@
           <a:lstStyle/>
           <a:p>
             <a:fld id="{0F9D2715-784A-EF47-8BB8-1EC61654F888}" type="datetime1">
-              <a:t>12/2/25</a:t>
+              <a:t>12/9/25</a:t>
             </a:fld>
             <a:endParaRPr lang="en-US"/>
           </a:p>
@@ -2558,7 +2559,7 @@
           <a:lstStyle/>
           <a:p>
             <a:fld id="{0F6C0B87-2C28-2F42-B149-3DAFEA53ECC4}" type="datetime1">
-              <a:t>12/2/25</a:t>
+              <a:t>12/9/25</a:t>
             </a:fld>
             <a:endParaRPr lang="en-US"/>
           </a:p>
@@ -2673,7 +2674,7 @@
           <a:lstStyle/>
           <a:p>
             <a:fld id="{B69CD03C-69FA-4241-B68E-D2384FD4F47D}" type="datetime1">
-              <a:t>12/2/25</a:t>
+              <a:t>12/9/25</a:t>
             </a:fld>
             <a:endParaRPr lang="en-US"/>
           </a:p>
@@ -2986,7 +2987,7 @@
           <a:lstStyle/>
           <a:p>
             <a:fld id="{89D5D19E-9609-2E4A-BDBE-9F0ABB4A5750}" type="datetime1">
-              <a:t>12/2/25</a:t>
+              <a:t>12/9/25</a:t>
             </a:fld>
             <a:endParaRPr lang="en-US"/>
           </a:p>
@@ -3276,7 +3277,7 @@
           <a:lstStyle/>
           <a:p>
             <a:fld id="{BD6C7064-511E-F24C-A670-C288EFD8459A}" type="datetime1">
-              <a:t>12/2/25</a:t>
+              <a:t>12/9/25</a:t>
             </a:fld>
             <a:endParaRPr lang="en-US"/>
           </a:p>
@@ -3519,7 +3520,7 @@
           </a:lstStyle>
           <a:p>
             <a:fld id="{4F82467D-5471-4140-A420-FCA960EC8A58}" type="datetime1">
-              <a:t>12/2/25</a:t>
+              <a:t>12/9/25</a:t>
             </a:fld>
             <a:endParaRPr lang="en-US"/>
           </a:p>
@@ -9090,6 +9091,41 @@
           </a:p>
         </p:txBody>
       </p:sp>
+      <p:sp>
+        <p:nvSpPr>
+          <p:cNvPr id="9" name="TextBox 8">
+            <a:extLst>
+              <a:ext uri="{FF2B5EF4-FFF2-40B4-BE49-F238E27FC236}">
+                <a16:creationId xmlns:a16="http://schemas.microsoft.com/office/drawing/2014/main" id="{9CAFCAAF-036B-0CA3-8DD4-BA6949899478}"/>
+              </a:ext>
+            </a:extLst>
+          </p:cNvPr>
+          <p:cNvSpPr txBox="1"/>
+          <p:nvPr/>
+        </p:nvSpPr>
+        <p:spPr>
+          <a:xfrm>
+            <a:off x="453843" y="5234132"/>
+            <a:ext cx="5686878" cy="369332"/>
+          </a:xfrm>
+          <a:prstGeom prst="rect">
+            <a:avLst/>
+          </a:prstGeom>
+          <a:noFill/>
+        </p:spPr>
+        <p:txBody>
+          <a:bodyPr wrap="none" rtlCol="0">
+            <a:spAutoFit/>
+          </a:bodyPr>
+          <a:lstStyle/>
+          <a:p>
+            <a:r>
+              <a:rPr lang="en-US"/>
+              <a:t>To run something really in parallel, you need JS Workers.</a:t>
+            </a:r>
+          </a:p>
+        </p:txBody>
+      </p:sp>
     </p:spTree>
     <p:extLst>
       <p:ext uri="{BB962C8B-B14F-4D97-AF65-F5344CB8AC3E}">
@@ -9100,6 +9136,882 @@
   <p:clrMapOvr>
     <a:masterClrMapping/>
   </p:clrMapOvr>
+  <p:timing>
+    <p:tnLst>
+      <p:par>
+        <p:cTn id="1" dur="indefinite" restart="never" nodeType="tmRoot">
+          <p:childTnLst>
+            <p:seq concurrent="1" nextAc="seek">
+              <p:cTn id="2" dur="indefinite" nodeType="mainSeq">
+                <p:childTnLst>
+                  <p:par>
+                    <p:cTn id="3" fill="hold">
+                      <p:stCondLst>
+                        <p:cond delay="indefinite"/>
+                      </p:stCondLst>
+                      <p:childTnLst>
+                        <p:par>
+                          <p:cTn id="4" fill="hold">
+                            <p:stCondLst>
+                              <p:cond delay="0"/>
+                            </p:stCondLst>
+                            <p:childTnLst>
+                              <p:par>
+                                <p:cTn id="5" presetID="1" presetClass="entr" presetSubtype="0" fill="hold" grpId="0" nodeType="clickEffect">
+                                  <p:stCondLst>
+                                    <p:cond delay="0"/>
+                                  </p:stCondLst>
+                                  <p:childTnLst>
+                                    <p:set>
+                                      <p:cBhvr>
+                                        <p:cTn id="6" dur="1" fill="hold">
+                                          <p:stCondLst>
+                                            <p:cond delay="0"/>
+                                          </p:stCondLst>
+                                        </p:cTn>
+                                        <p:tgtEl>
+                                          <p:spTgt spid="2"/>
+                                        </p:tgtEl>
+                                        <p:attrNameLst>
+                                          <p:attrName>style.visibility</p:attrName>
+                                        </p:attrNameLst>
+                                      </p:cBhvr>
+                                      <p:to>
+                                        <p:strVal val="visible"/>
+                                      </p:to>
+                                    </p:set>
+                                  </p:childTnLst>
+                                </p:cTn>
+                              </p:par>
+                            </p:childTnLst>
+                          </p:cTn>
+                        </p:par>
+                      </p:childTnLst>
+                    </p:cTn>
+                  </p:par>
+                  <p:par>
+                    <p:cTn id="7" fill="hold">
+                      <p:stCondLst>
+                        <p:cond delay="indefinite"/>
+                      </p:stCondLst>
+                      <p:childTnLst>
+                        <p:par>
+                          <p:cTn id="8" fill="hold">
+                            <p:stCondLst>
+                              <p:cond delay="0"/>
+                            </p:stCondLst>
+                            <p:childTnLst>
+                              <p:par>
+                                <p:cTn id="9" presetID="1" presetClass="entr" presetSubtype="0" fill="hold" grpId="0" nodeType="clickEffect">
+                                  <p:stCondLst>
+                                    <p:cond delay="0"/>
+                                  </p:stCondLst>
+                                  <p:childTnLst>
+                                    <p:set>
+                                      <p:cBhvr>
+                                        <p:cTn id="10" dur="1" fill="hold">
+                                          <p:stCondLst>
+                                            <p:cond delay="0"/>
+                                          </p:stCondLst>
+                                        </p:cTn>
+                                        <p:tgtEl>
+                                          <p:spTgt spid="3"/>
+                                        </p:tgtEl>
+                                        <p:attrNameLst>
+                                          <p:attrName>style.visibility</p:attrName>
+                                        </p:attrNameLst>
+                                      </p:cBhvr>
+                                      <p:to>
+                                        <p:strVal val="visible"/>
+                                      </p:to>
+                                    </p:set>
+                                  </p:childTnLst>
+                                </p:cTn>
+                              </p:par>
+                            </p:childTnLst>
+                          </p:cTn>
+                        </p:par>
+                      </p:childTnLst>
+                    </p:cTn>
+                  </p:par>
+                  <p:par>
+                    <p:cTn id="11" fill="hold">
+                      <p:stCondLst>
+                        <p:cond delay="indefinite"/>
+                      </p:stCondLst>
+                      <p:childTnLst>
+                        <p:par>
+                          <p:cTn id="12" fill="hold">
+                            <p:stCondLst>
+                              <p:cond delay="0"/>
+                            </p:stCondLst>
+                            <p:childTnLst>
+                              <p:par>
+                                <p:cTn id="13" presetID="1" presetClass="entr" presetSubtype="0" fill="hold" grpId="0" nodeType="clickEffect">
+                                  <p:stCondLst>
+                                    <p:cond delay="0"/>
+                                  </p:stCondLst>
+                                  <p:childTnLst>
+                                    <p:set>
+                                      <p:cBhvr>
+                                        <p:cTn id="14" dur="1" fill="hold">
+                                          <p:stCondLst>
+                                            <p:cond delay="0"/>
+                                          </p:stCondLst>
+                                        </p:cTn>
+                                        <p:tgtEl>
+                                          <p:spTgt spid="7"/>
+                                        </p:tgtEl>
+                                        <p:attrNameLst>
+                                          <p:attrName>style.visibility</p:attrName>
+                                        </p:attrNameLst>
+                                      </p:cBhvr>
+                                      <p:to>
+                                        <p:strVal val="visible"/>
+                                      </p:to>
+                                    </p:set>
+                                  </p:childTnLst>
+                                </p:cTn>
+                              </p:par>
+                            </p:childTnLst>
+                          </p:cTn>
+                        </p:par>
+                      </p:childTnLst>
+                    </p:cTn>
+                  </p:par>
+                  <p:par>
+                    <p:cTn id="15" fill="hold">
+                      <p:stCondLst>
+                        <p:cond delay="indefinite"/>
+                      </p:stCondLst>
+                      <p:childTnLst>
+                        <p:par>
+                          <p:cTn id="16" fill="hold">
+                            <p:stCondLst>
+                              <p:cond delay="0"/>
+                            </p:stCondLst>
+                            <p:childTnLst>
+                              <p:par>
+                                <p:cTn id="17" presetID="1" presetClass="entr" presetSubtype="0" fill="hold" grpId="0" nodeType="clickEffect">
+                                  <p:stCondLst>
+                                    <p:cond delay="0"/>
+                                  </p:stCondLst>
+                                  <p:childTnLst>
+                                    <p:set>
+                                      <p:cBhvr>
+                                        <p:cTn id="18" dur="1" fill="hold">
+                                          <p:stCondLst>
+                                            <p:cond delay="0"/>
+                                          </p:stCondLst>
+                                        </p:cTn>
+                                        <p:tgtEl>
+                                          <p:spTgt spid="8"/>
+                                        </p:tgtEl>
+                                        <p:attrNameLst>
+                                          <p:attrName>style.visibility</p:attrName>
+                                        </p:attrNameLst>
+                                      </p:cBhvr>
+                                      <p:to>
+                                        <p:strVal val="visible"/>
+                                      </p:to>
+                                    </p:set>
+                                  </p:childTnLst>
+                                </p:cTn>
+                              </p:par>
+                            </p:childTnLst>
+                          </p:cTn>
+                        </p:par>
+                      </p:childTnLst>
+                    </p:cTn>
+                  </p:par>
+                  <p:par>
+                    <p:cTn id="19" fill="hold">
+                      <p:stCondLst>
+                        <p:cond delay="indefinite"/>
+                      </p:stCondLst>
+                      <p:childTnLst>
+                        <p:par>
+                          <p:cTn id="20" fill="hold">
+                            <p:stCondLst>
+                              <p:cond delay="0"/>
+                            </p:stCondLst>
+                            <p:childTnLst>
+                              <p:par>
+                                <p:cTn id="21" presetID="1" presetClass="entr" presetSubtype="0" fill="hold" grpId="0" nodeType="clickEffect">
+                                  <p:stCondLst>
+                                    <p:cond delay="0"/>
+                                  </p:stCondLst>
+                                  <p:childTnLst>
+                                    <p:set>
+                                      <p:cBhvr>
+                                        <p:cTn id="22" dur="1" fill="hold">
+                                          <p:stCondLst>
+                                            <p:cond delay="0"/>
+                                          </p:stCondLst>
+                                        </p:cTn>
+                                        <p:tgtEl>
+                                          <p:spTgt spid="9"/>
+                                        </p:tgtEl>
+                                        <p:attrNameLst>
+                                          <p:attrName>style.visibility</p:attrName>
+                                        </p:attrNameLst>
+                                      </p:cBhvr>
+                                      <p:to>
+                                        <p:strVal val="visible"/>
+                                      </p:to>
+                                    </p:set>
+                                  </p:childTnLst>
+                                </p:cTn>
+                              </p:par>
+                            </p:childTnLst>
+                          </p:cTn>
+                        </p:par>
+                      </p:childTnLst>
+                    </p:cTn>
+                  </p:par>
+                </p:childTnLst>
+              </p:cTn>
+              <p:prevCondLst>
+                <p:cond evt="onPrev" delay="0">
+                  <p:tgtEl>
+                    <p:sldTgt/>
+                  </p:tgtEl>
+                </p:cond>
+              </p:prevCondLst>
+              <p:nextCondLst>
+                <p:cond evt="onNext" delay="0">
+                  <p:tgtEl>
+                    <p:sldTgt/>
+                  </p:tgtEl>
+                </p:cond>
+              </p:nextCondLst>
+            </p:seq>
+          </p:childTnLst>
+        </p:cTn>
+      </p:par>
+    </p:tnLst>
+    <p:bldLst>
+      <p:bldP spid="2" grpId="0"/>
+      <p:bldP spid="3" grpId="0"/>
+      <p:bldP spid="7" grpId="0"/>
+      <p:bldP spid="8" grpId="0"/>
+      <p:bldP spid="9" grpId="0"/>
+    </p:bldLst>
+  </p:timing>
+</p:sld>
+</file>
+
+<file path=ppt/slides/slide16.xml><?xml version="1.0" encoding="utf-8"?>
+<p:sld xmlns:a="http://schemas.openxmlformats.org/drawingml/2006/main" xmlns:r="http://schemas.openxmlformats.org/officeDocument/2006/relationships" xmlns:p="http://schemas.openxmlformats.org/presentationml/2006/main">
+  <p:cSld>
+    <p:spTree>
+      <p:nvGrpSpPr>
+        <p:cNvPr id="1" name="">
+          <a:extLst>
+            <a:ext uri="{FF2B5EF4-FFF2-40B4-BE49-F238E27FC236}">
+              <a16:creationId xmlns:a16="http://schemas.microsoft.com/office/drawing/2014/main" id="{EC3E0955-D571-BCC0-B6E5-6E7D96676172}"/>
+            </a:ext>
+          </a:extLst>
+        </p:cNvPr>
+        <p:cNvGrpSpPr/>
+        <p:nvPr/>
+      </p:nvGrpSpPr>
+      <p:grpSpPr>
+        <a:xfrm>
+          <a:off x="0" y="0"/>
+          <a:ext cx="0" cy="0"/>
+          <a:chOff x="0" y="0"/>
+          <a:chExt cx="0" cy="0"/>
+        </a:xfrm>
+      </p:grpSpPr>
+      <p:sp>
+        <p:nvSpPr>
+          <p:cNvPr id="4" name="Footer Placeholder 3">
+            <a:extLst>
+              <a:ext uri="{FF2B5EF4-FFF2-40B4-BE49-F238E27FC236}">
+                <a16:creationId xmlns:a16="http://schemas.microsoft.com/office/drawing/2014/main" id="{3F7F8DF4-E82D-3235-3514-241CABA8E7A0}"/>
+              </a:ext>
+            </a:extLst>
+          </p:cNvPr>
+          <p:cNvSpPr>
+            <a:spLocks noGrp="1"/>
+          </p:cNvSpPr>
+          <p:nvPr>
+            <p:ph type="ftr" sz="quarter" idx="11"/>
+          </p:nvPr>
+        </p:nvSpPr>
+        <p:spPr/>
+        <p:txBody>
+          <a:bodyPr/>
+          <a:lstStyle/>
+          <a:p>
+            <a:r>
+              <a:rPr lang="en-US"/>
+              <a:t>ASE - Concurrency</a:t>
+            </a:r>
+          </a:p>
+        </p:txBody>
+      </p:sp>
+      <p:sp>
+        <p:nvSpPr>
+          <p:cNvPr id="5" name="Slide Number Placeholder 4">
+            <a:extLst>
+              <a:ext uri="{FF2B5EF4-FFF2-40B4-BE49-F238E27FC236}">
+                <a16:creationId xmlns:a16="http://schemas.microsoft.com/office/drawing/2014/main" id="{BAAB0FA0-3A98-81D9-8C08-82043E51DDA2}"/>
+              </a:ext>
+            </a:extLst>
+          </p:cNvPr>
+          <p:cNvSpPr>
+            <a:spLocks noGrp="1"/>
+          </p:cNvSpPr>
+          <p:nvPr>
+            <p:ph type="sldNum" sz="quarter" idx="12"/>
+          </p:nvPr>
+        </p:nvSpPr>
+        <p:spPr/>
+        <p:txBody>
+          <a:bodyPr/>
+          <a:lstStyle/>
+          <a:p>
+            <a:fld id="{23D81C8F-CB39-4E4D-98E4-8C3FEDF75126}" type="slidenum">
+              <a:rPr lang="en-US" smtClean="0"/>
+              <a:t>16</a:t>
+            </a:fld>
+            <a:endParaRPr lang="en-US"/>
+          </a:p>
+        </p:txBody>
+      </p:sp>
+      <p:sp>
+        <p:nvSpPr>
+          <p:cNvPr id="6" name="TextBox 5">
+            <a:extLst>
+              <a:ext uri="{FF2B5EF4-FFF2-40B4-BE49-F238E27FC236}">
+                <a16:creationId xmlns:a16="http://schemas.microsoft.com/office/drawing/2014/main" id="{ED38D71F-3319-5F87-F0C0-D833DA071A9D}"/>
+              </a:ext>
+            </a:extLst>
+          </p:cNvPr>
+          <p:cNvSpPr txBox="1"/>
+          <p:nvPr/>
+        </p:nvSpPr>
+        <p:spPr>
+          <a:xfrm>
+            <a:off x="404037" y="265074"/>
+            <a:ext cx="1257204" cy="369332"/>
+          </a:xfrm>
+          <a:prstGeom prst="rect">
+            <a:avLst/>
+          </a:prstGeom>
+          <a:noFill/>
+        </p:spPr>
+        <p:txBody>
+          <a:bodyPr wrap="none" rtlCol="0">
+            <a:spAutoFit/>
+          </a:bodyPr>
+          <a:lstStyle/>
+          <a:p>
+            <a:r>
+              <a:rPr lang="en-US"/>
+              <a:t>Takeaways</a:t>
+            </a:r>
+          </a:p>
+        </p:txBody>
+      </p:sp>
+      <p:sp>
+        <p:nvSpPr>
+          <p:cNvPr id="9" name="TextBox 8">
+            <a:extLst>
+              <a:ext uri="{FF2B5EF4-FFF2-40B4-BE49-F238E27FC236}">
+                <a16:creationId xmlns:a16="http://schemas.microsoft.com/office/drawing/2014/main" id="{03933D60-4E35-75A2-60DD-7F4BEBD83CE9}"/>
+              </a:ext>
+            </a:extLst>
+          </p:cNvPr>
+          <p:cNvSpPr txBox="1"/>
+          <p:nvPr/>
+        </p:nvSpPr>
+        <p:spPr>
+          <a:xfrm>
+            <a:off x="475861" y="1091681"/>
+            <a:ext cx="7981929" cy="4524315"/>
+          </a:xfrm>
+          <a:prstGeom prst="rect">
+            <a:avLst/>
+          </a:prstGeom>
+          <a:noFill/>
+        </p:spPr>
+        <p:txBody>
+          <a:bodyPr wrap="none" rtlCol="0">
+            <a:spAutoFit/>
+          </a:bodyPr>
+          <a:lstStyle/>
+          <a:p>
+            <a:pPr marL="285750" indent="-285750">
+              <a:buFont typeface="Arial" panose="020B0604020202020204" pitchFamily="34" charset="0"/>
+              <a:buChar char="•"/>
+            </a:pPr>
+            <a:r>
+              <a:rPr lang="en-US"/>
+              <a:t>Use thread pools =&gt; Avoid thread creation overhead</a:t>
+            </a:r>
+          </a:p>
+          <a:p>
+            <a:pPr marL="285750" indent="-285750">
+              <a:buFont typeface="Arial" panose="020B0604020202020204" pitchFamily="34" charset="0"/>
+              <a:buChar char="•"/>
+            </a:pPr>
+            <a:endParaRPr lang="en-US"/>
+          </a:p>
+          <a:p>
+            <a:pPr marL="285750" indent="-285750">
+              <a:buFont typeface="Arial" panose="020B0604020202020204" pitchFamily="34" charset="0"/>
+              <a:buChar char="•"/>
+            </a:pPr>
+            <a:endParaRPr lang="en-US"/>
+          </a:p>
+          <a:p>
+            <a:pPr marL="285750" indent="-285750">
+              <a:buFont typeface="Arial" panose="020B0604020202020204" pitchFamily="34" charset="0"/>
+              <a:buChar char="•"/>
+            </a:pPr>
+            <a:r>
+              <a:rPr lang="en-US"/>
+              <a:t>Prefer immutability =&gt; Eliminate synchronization needs</a:t>
+            </a:r>
+          </a:p>
+          <a:p>
+            <a:pPr marL="285750" indent="-285750">
+              <a:buFont typeface="Arial" panose="020B0604020202020204" pitchFamily="34" charset="0"/>
+              <a:buChar char="•"/>
+            </a:pPr>
+            <a:endParaRPr lang="en-US"/>
+          </a:p>
+          <a:p>
+            <a:pPr marL="285750" indent="-285750">
+              <a:buFont typeface="Arial" panose="020B0604020202020204" pitchFamily="34" charset="0"/>
+              <a:buChar char="•"/>
+            </a:pPr>
+            <a:endParaRPr lang="en-US"/>
+          </a:p>
+          <a:p>
+            <a:pPr marL="285750" indent="-285750">
+              <a:buFont typeface="Arial" panose="020B0604020202020204" pitchFamily="34" charset="0"/>
+              <a:buChar char="•"/>
+            </a:pPr>
+            <a:r>
+              <a:rPr lang="en-US"/>
+              <a:t>Use high-level concurrency APIs =&gt; Fewer bugs than low-level locks</a:t>
+            </a:r>
+          </a:p>
+          <a:p>
+            <a:pPr marL="285750" indent="-285750">
+              <a:buFont typeface="Arial" panose="020B0604020202020204" pitchFamily="34" charset="0"/>
+              <a:buChar char="•"/>
+            </a:pPr>
+            <a:endParaRPr lang="en-US"/>
+          </a:p>
+          <a:p>
+            <a:pPr marL="285750" indent="-285750">
+              <a:buFont typeface="Arial" panose="020B0604020202020204" pitchFamily="34" charset="0"/>
+              <a:buChar char="•"/>
+            </a:pPr>
+            <a:endParaRPr lang="en-US"/>
+          </a:p>
+          <a:p>
+            <a:pPr marL="285750" indent="-285750">
+              <a:buFont typeface="Arial" panose="020B0604020202020204" pitchFamily="34" charset="0"/>
+              <a:buChar char="•"/>
+            </a:pPr>
+            <a:r>
+              <a:rPr lang="en-US"/>
+              <a:t>Limit concurrency =&gt; Prevent resource exhaustion</a:t>
+            </a:r>
+          </a:p>
+          <a:p>
+            <a:pPr marL="285750" indent="-285750">
+              <a:buFont typeface="Arial" panose="020B0604020202020204" pitchFamily="34" charset="0"/>
+              <a:buChar char="•"/>
+            </a:pPr>
+            <a:endParaRPr lang="en-US"/>
+          </a:p>
+          <a:p>
+            <a:pPr marL="285750" indent="-285750">
+              <a:buFont typeface="Arial" panose="020B0604020202020204" pitchFamily="34" charset="0"/>
+              <a:buChar char="•"/>
+            </a:pPr>
+            <a:endParaRPr lang="en-US"/>
+          </a:p>
+          <a:p>
+            <a:pPr marL="285750" indent="-285750">
+              <a:buFont typeface="Arial" panose="020B0604020202020204" pitchFamily="34" charset="0"/>
+              <a:buChar char="•"/>
+            </a:pPr>
+            <a:r>
+              <a:rPr lang="en-US"/>
+              <a:t>Use scoped resource =&gt; Guarantee resource cleanup</a:t>
+            </a:r>
+          </a:p>
+          <a:p>
+            <a:pPr marL="285750" indent="-285750">
+              <a:buFont typeface="Arial" panose="020B0604020202020204" pitchFamily="34" charset="0"/>
+              <a:buChar char="•"/>
+            </a:pPr>
+            <a:endParaRPr lang="en-US"/>
+          </a:p>
+          <a:p>
+            <a:pPr marL="285750" indent="-285750">
+              <a:buFont typeface="Arial" panose="020B0604020202020204" pitchFamily="34" charset="0"/>
+              <a:buChar char="•"/>
+            </a:pPr>
+            <a:endParaRPr lang="en-US"/>
+          </a:p>
+          <a:p>
+            <a:pPr marL="285750" indent="-285750">
+              <a:buFont typeface="Arial" panose="020B0604020202020204" pitchFamily="34" charset="0"/>
+              <a:buChar char="•"/>
+            </a:pPr>
+            <a:r>
+              <a:rPr lang="en-US"/>
+              <a:t>Use virtual threads =&gt; Scale to millions of threads (if allowed by the runtime)</a:t>
+            </a:r>
+          </a:p>
+        </p:txBody>
+      </p:sp>
+    </p:spTree>
+    <p:extLst>
+      <p:ext uri="{BB962C8B-B14F-4D97-AF65-F5344CB8AC3E}">
+        <p14:creationId xmlns:p14="http://schemas.microsoft.com/office/powerpoint/2010/main" val="323046520"/>
+      </p:ext>
+    </p:extLst>
+  </p:cSld>
+  <p:clrMapOvr>
+    <a:masterClrMapping/>
+  </p:clrMapOvr>
+  <p:timing>
+    <p:tnLst>
+      <p:par>
+        <p:cTn id="1" dur="indefinite" restart="never" nodeType="tmRoot">
+          <p:childTnLst>
+            <p:seq concurrent="1" nextAc="seek">
+              <p:cTn id="2" dur="indefinite" nodeType="mainSeq">
+                <p:childTnLst>
+                  <p:par>
+                    <p:cTn id="3" fill="hold">
+                      <p:stCondLst>
+                        <p:cond delay="indefinite"/>
+                      </p:stCondLst>
+                      <p:childTnLst>
+                        <p:par>
+                          <p:cTn id="4" fill="hold">
+                            <p:stCondLst>
+                              <p:cond delay="0"/>
+                            </p:stCondLst>
+                            <p:childTnLst>
+                              <p:par>
+                                <p:cTn id="5" presetID="1" presetClass="entr" presetSubtype="0" fill="hold" grpId="0" nodeType="clickEffect">
+                                  <p:stCondLst>
+                                    <p:cond delay="0"/>
+                                  </p:stCondLst>
+                                  <p:childTnLst>
+                                    <p:set>
+                                      <p:cBhvr>
+                                        <p:cTn id="6" dur="1" fill="hold">
+                                          <p:stCondLst>
+                                            <p:cond delay="0"/>
+                                          </p:stCondLst>
+                                        </p:cTn>
+                                        <p:tgtEl>
+                                          <p:spTgt spid="9">
+                                            <p:txEl>
+                                              <p:pRg st="0" end="0"/>
+                                            </p:txEl>
+                                          </p:spTgt>
+                                        </p:tgtEl>
+                                        <p:attrNameLst>
+                                          <p:attrName>style.visibility</p:attrName>
+                                        </p:attrNameLst>
+                                      </p:cBhvr>
+                                      <p:to>
+                                        <p:strVal val="visible"/>
+                                      </p:to>
+                                    </p:set>
+                                  </p:childTnLst>
+                                </p:cTn>
+                              </p:par>
+                            </p:childTnLst>
+                          </p:cTn>
+                        </p:par>
+                      </p:childTnLst>
+                    </p:cTn>
+                  </p:par>
+                  <p:par>
+                    <p:cTn id="7" fill="hold">
+                      <p:stCondLst>
+                        <p:cond delay="indefinite"/>
+                      </p:stCondLst>
+                      <p:childTnLst>
+                        <p:par>
+                          <p:cTn id="8" fill="hold">
+                            <p:stCondLst>
+                              <p:cond delay="0"/>
+                            </p:stCondLst>
+                            <p:childTnLst>
+                              <p:par>
+                                <p:cTn id="9" presetID="1" presetClass="entr" presetSubtype="0" fill="hold" grpId="0" nodeType="clickEffect">
+                                  <p:stCondLst>
+                                    <p:cond delay="0"/>
+                                  </p:stCondLst>
+                                  <p:childTnLst>
+                                    <p:set>
+                                      <p:cBhvr>
+                                        <p:cTn id="10" dur="1" fill="hold">
+                                          <p:stCondLst>
+                                            <p:cond delay="0"/>
+                                          </p:stCondLst>
+                                        </p:cTn>
+                                        <p:tgtEl>
+                                          <p:spTgt spid="9">
+                                            <p:txEl>
+                                              <p:pRg st="3" end="3"/>
+                                            </p:txEl>
+                                          </p:spTgt>
+                                        </p:tgtEl>
+                                        <p:attrNameLst>
+                                          <p:attrName>style.visibility</p:attrName>
+                                        </p:attrNameLst>
+                                      </p:cBhvr>
+                                      <p:to>
+                                        <p:strVal val="visible"/>
+                                      </p:to>
+                                    </p:set>
+                                  </p:childTnLst>
+                                </p:cTn>
+                              </p:par>
+                            </p:childTnLst>
+                          </p:cTn>
+                        </p:par>
+                      </p:childTnLst>
+                    </p:cTn>
+                  </p:par>
+                  <p:par>
+                    <p:cTn id="11" fill="hold">
+                      <p:stCondLst>
+                        <p:cond delay="indefinite"/>
+                      </p:stCondLst>
+                      <p:childTnLst>
+                        <p:par>
+                          <p:cTn id="12" fill="hold">
+                            <p:stCondLst>
+                              <p:cond delay="0"/>
+                            </p:stCondLst>
+                            <p:childTnLst>
+                              <p:par>
+                                <p:cTn id="13" presetID="1" presetClass="entr" presetSubtype="0" fill="hold" grpId="0" nodeType="clickEffect">
+                                  <p:stCondLst>
+                                    <p:cond delay="0"/>
+                                  </p:stCondLst>
+                                  <p:childTnLst>
+                                    <p:set>
+                                      <p:cBhvr>
+                                        <p:cTn id="14" dur="1" fill="hold">
+                                          <p:stCondLst>
+                                            <p:cond delay="0"/>
+                                          </p:stCondLst>
+                                        </p:cTn>
+                                        <p:tgtEl>
+                                          <p:spTgt spid="9">
+                                            <p:txEl>
+                                              <p:pRg st="6" end="6"/>
+                                            </p:txEl>
+                                          </p:spTgt>
+                                        </p:tgtEl>
+                                        <p:attrNameLst>
+                                          <p:attrName>style.visibility</p:attrName>
+                                        </p:attrNameLst>
+                                      </p:cBhvr>
+                                      <p:to>
+                                        <p:strVal val="visible"/>
+                                      </p:to>
+                                    </p:set>
+                                  </p:childTnLst>
+                                </p:cTn>
+                              </p:par>
+                            </p:childTnLst>
+                          </p:cTn>
+                        </p:par>
+                      </p:childTnLst>
+                    </p:cTn>
+                  </p:par>
+                  <p:par>
+                    <p:cTn id="15" fill="hold">
+                      <p:stCondLst>
+                        <p:cond delay="indefinite"/>
+                      </p:stCondLst>
+                      <p:childTnLst>
+                        <p:par>
+                          <p:cTn id="16" fill="hold">
+                            <p:stCondLst>
+                              <p:cond delay="0"/>
+                            </p:stCondLst>
+                            <p:childTnLst>
+                              <p:par>
+                                <p:cTn id="17" presetID="1" presetClass="entr" presetSubtype="0" fill="hold" grpId="0" nodeType="clickEffect">
+                                  <p:stCondLst>
+                                    <p:cond delay="0"/>
+                                  </p:stCondLst>
+                                  <p:childTnLst>
+                                    <p:set>
+                                      <p:cBhvr>
+                                        <p:cTn id="18" dur="1" fill="hold">
+                                          <p:stCondLst>
+                                            <p:cond delay="0"/>
+                                          </p:stCondLst>
+                                        </p:cTn>
+                                        <p:tgtEl>
+                                          <p:spTgt spid="9">
+                                            <p:txEl>
+                                              <p:pRg st="9" end="9"/>
+                                            </p:txEl>
+                                          </p:spTgt>
+                                        </p:tgtEl>
+                                        <p:attrNameLst>
+                                          <p:attrName>style.visibility</p:attrName>
+                                        </p:attrNameLst>
+                                      </p:cBhvr>
+                                      <p:to>
+                                        <p:strVal val="visible"/>
+                                      </p:to>
+                                    </p:set>
+                                  </p:childTnLst>
+                                </p:cTn>
+                              </p:par>
+                            </p:childTnLst>
+                          </p:cTn>
+                        </p:par>
+                      </p:childTnLst>
+                    </p:cTn>
+                  </p:par>
+                  <p:par>
+                    <p:cTn id="19" fill="hold">
+                      <p:stCondLst>
+                        <p:cond delay="indefinite"/>
+                      </p:stCondLst>
+                      <p:childTnLst>
+                        <p:par>
+                          <p:cTn id="20" fill="hold">
+                            <p:stCondLst>
+                              <p:cond delay="0"/>
+                            </p:stCondLst>
+                            <p:childTnLst>
+                              <p:par>
+                                <p:cTn id="21" presetID="1" presetClass="entr" presetSubtype="0" fill="hold" grpId="0" nodeType="clickEffect">
+                                  <p:stCondLst>
+                                    <p:cond delay="0"/>
+                                  </p:stCondLst>
+                                  <p:childTnLst>
+                                    <p:set>
+                                      <p:cBhvr>
+                                        <p:cTn id="22" dur="1" fill="hold">
+                                          <p:stCondLst>
+                                            <p:cond delay="0"/>
+                                          </p:stCondLst>
+                                        </p:cTn>
+                                        <p:tgtEl>
+                                          <p:spTgt spid="9">
+                                            <p:txEl>
+                                              <p:pRg st="12" end="12"/>
+                                            </p:txEl>
+                                          </p:spTgt>
+                                        </p:tgtEl>
+                                        <p:attrNameLst>
+                                          <p:attrName>style.visibility</p:attrName>
+                                        </p:attrNameLst>
+                                      </p:cBhvr>
+                                      <p:to>
+                                        <p:strVal val="visible"/>
+                                      </p:to>
+                                    </p:set>
+                                  </p:childTnLst>
+                                </p:cTn>
+                              </p:par>
+                            </p:childTnLst>
+                          </p:cTn>
+                        </p:par>
+                      </p:childTnLst>
+                    </p:cTn>
+                  </p:par>
+                  <p:par>
+                    <p:cTn id="23" fill="hold">
+                      <p:stCondLst>
+                        <p:cond delay="indefinite"/>
+                      </p:stCondLst>
+                      <p:childTnLst>
+                        <p:par>
+                          <p:cTn id="24" fill="hold">
+                            <p:stCondLst>
+                              <p:cond delay="0"/>
+                            </p:stCondLst>
+                            <p:childTnLst>
+                              <p:par>
+                                <p:cTn id="25" presetID="1" presetClass="entr" presetSubtype="0" fill="hold" grpId="0" nodeType="clickEffect">
+                                  <p:stCondLst>
+                                    <p:cond delay="0"/>
+                                  </p:stCondLst>
+                                  <p:childTnLst>
+                                    <p:set>
+                                      <p:cBhvr>
+                                        <p:cTn id="26" dur="1" fill="hold">
+                                          <p:stCondLst>
+                                            <p:cond delay="0"/>
+                                          </p:stCondLst>
+                                        </p:cTn>
+                                        <p:tgtEl>
+                                          <p:spTgt spid="9">
+                                            <p:txEl>
+                                              <p:pRg st="15" end="15"/>
+                                            </p:txEl>
+                                          </p:spTgt>
+                                        </p:tgtEl>
+                                        <p:attrNameLst>
+                                          <p:attrName>style.visibility</p:attrName>
+                                        </p:attrNameLst>
+                                      </p:cBhvr>
+                                      <p:to>
+                                        <p:strVal val="visible"/>
+                                      </p:to>
+                                    </p:set>
+                                  </p:childTnLst>
+                                </p:cTn>
+                              </p:par>
+                            </p:childTnLst>
+                          </p:cTn>
+                        </p:par>
+                      </p:childTnLst>
+                    </p:cTn>
+                  </p:par>
+                </p:childTnLst>
+              </p:cTn>
+              <p:prevCondLst>
+                <p:cond evt="onPrev" delay="0">
+                  <p:tgtEl>
+                    <p:sldTgt/>
+                  </p:tgtEl>
+                </p:cond>
+              </p:prevCondLst>
+              <p:nextCondLst>
+                <p:cond evt="onNext" delay="0">
+                  <p:tgtEl>
+                    <p:sldTgt/>
+                  </p:tgtEl>
+                </p:cond>
+              </p:nextCondLst>
+            </p:seq>
+          </p:childTnLst>
+        </p:cTn>
+      </p:par>
+    </p:tnLst>
+    <p:bldLst>
+      <p:bldP spid="9" grpId="0" build="p"/>
+    </p:bldLst>
+  </p:timing>
 </p:sld>
 </file>
 
@@ -9404,6 +10316,480 @@
   <p:clrMapOvr>
     <a:masterClrMapping/>
   </p:clrMapOvr>
+  <p:timing>
+    <p:tnLst>
+      <p:par>
+        <p:cTn id="1" dur="indefinite" restart="never" nodeType="tmRoot">
+          <p:childTnLst>
+            <p:seq concurrent="1" nextAc="seek">
+              <p:cTn id="2" dur="indefinite" nodeType="mainSeq">
+                <p:childTnLst>
+                  <p:par>
+                    <p:cTn id="3" fill="hold">
+                      <p:stCondLst>
+                        <p:cond delay="indefinite"/>
+                      </p:stCondLst>
+                      <p:childTnLst>
+                        <p:par>
+                          <p:cTn id="4" fill="hold">
+                            <p:stCondLst>
+                              <p:cond delay="0"/>
+                            </p:stCondLst>
+                            <p:childTnLst>
+                              <p:par>
+                                <p:cTn id="5" presetID="1" presetClass="entr" presetSubtype="0" fill="hold" grpId="0" nodeType="clickEffect">
+                                  <p:stCondLst>
+                                    <p:cond delay="0"/>
+                                  </p:stCondLst>
+                                  <p:childTnLst>
+                                    <p:set>
+                                      <p:cBhvr>
+                                        <p:cTn id="6" dur="1" fill="hold">
+                                          <p:stCondLst>
+                                            <p:cond delay="0"/>
+                                          </p:stCondLst>
+                                        </p:cTn>
+                                        <p:tgtEl>
+                                          <p:spTgt spid="7">
+                                            <p:txEl>
+                                              <p:pRg st="0" end="0"/>
+                                            </p:txEl>
+                                          </p:spTgt>
+                                        </p:tgtEl>
+                                        <p:attrNameLst>
+                                          <p:attrName>style.visibility</p:attrName>
+                                        </p:attrNameLst>
+                                      </p:cBhvr>
+                                      <p:to>
+                                        <p:strVal val="visible"/>
+                                      </p:to>
+                                    </p:set>
+                                  </p:childTnLst>
+                                </p:cTn>
+                              </p:par>
+                            </p:childTnLst>
+                          </p:cTn>
+                        </p:par>
+                      </p:childTnLst>
+                    </p:cTn>
+                  </p:par>
+                  <p:par>
+                    <p:cTn id="7" fill="hold">
+                      <p:stCondLst>
+                        <p:cond delay="indefinite"/>
+                      </p:stCondLst>
+                      <p:childTnLst>
+                        <p:par>
+                          <p:cTn id="8" fill="hold">
+                            <p:stCondLst>
+                              <p:cond delay="0"/>
+                            </p:stCondLst>
+                            <p:childTnLst>
+                              <p:par>
+                                <p:cTn id="9" presetID="1" presetClass="entr" presetSubtype="0" fill="hold" grpId="0" nodeType="clickEffect">
+                                  <p:stCondLst>
+                                    <p:cond delay="0"/>
+                                  </p:stCondLst>
+                                  <p:childTnLst>
+                                    <p:set>
+                                      <p:cBhvr>
+                                        <p:cTn id="10" dur="1" fill="hold">
+                                          <p:stCondLst>
+                                            <p:cond delay="0"/>
+                                          </p:stCondLst>
+                                        </p:cTn>
+                                        <p:tgtEl>
+                                          <p:spTgt spid="7">
+                                            <p:txEl>
+                                              <p:pRg st="2" end="2"/>
+                                            </p:txEl>
+                                          </p:spTgt>
+                                        </p:tgtEl>
+                                        <p:attrNameLst>
+                                          <p:attrName>style.visibility</p:attrName>
+                                        </p:attrNameLst>
+                                      </p:cBhvr>
+                                      <p:to>
+                                        <p:strVal val="visible"/>
+                                      </p:to>
+                                    </p:set>
+                                  </p:childTnLst>
+                                </p:cTn>
+                              </p:par>
+                            </p:childTnLst>
+                          </p:cTn>
+                        </p:par>
+                      </p:childTnLst>
+                    </p:cTn>
+                  </p:par>
+                  <p:par>
+                    <p:cTn id="11" fill="hold">
+                      <p:stCondLst>
+                        <p:cond delay="indefinite"/>
+                      </p:stCondLst>
+                      <p:childTnLst>
+                        <p:par>
+                          <p:cTn id="12" fill="hold">
+                            <p:stCondLst>
+                              <p:cond delay="0"/>
+                            </p:stCondLst>
+                            <p:childTnLst>
+                              <p:par>
+                                <p:cTn id="13" presetID="1" presetClass="entr" presetSubtype="0" fill="hold" grpId="0" nodeType="clickEffect">
+                                  <p:stCondLst>
+                                    <p:cond delay="0"/>
+                                  </p:stCondLst>
+                                  <p:childTnLst>
+                                    <p:set>
+                                      <p:cBhvr>
+                                        <p:cTn id="14" dur="1" fill="hold">
+                                          <p:stCondLst>
+                                            <p:cond delay="0"/>
+                                          </p:stCondLst>
+                                        </p:cTn>
+                                        <p:tgtEl>
+                                          <p:spTgt spid="7">
+                                            <p:txEl>
+                                              <p:pRg st="4" end="4"/>
+                                            </p:txEl>
+                                          </p:spTgt>
+                                        </p:tgtEl>
+                                        <p:attrNameLst>
+                                          <p:attrName>style.visibility</p:attrName>
+                                        </p:attrNameLst>
+                                      </p:cBhvr>
+                                      <p:to>
+                                        <p:strVal val="visible"/>
+                                      </p:to>
+                                    </p:set>
+                                  </p:childTnLst>
+                                </p:cTn>
+                              </p:par>
+                            </p:childTnLst>
+                          </p:cTn>
+                        </p:par>
+                      </p:childTnLst>
+                    </p:cTn>
+                  </p:par>
+                  <p:par>
+                    <p:cTn id="15" fill="hold">
+                      <p:stCondLst>
+                        <p:cond delay="indefinite"/>
+                      </p:stCondLst>
+                      <p:childTnLst>
+                        <p:par>
+                          <p:cTn id="16" fill="hold">
+                            <p:stCondLst>
+                              <p:cond delay="0"/>
+                            </p:stCondLst>
+                            <p:childTnLst>
+                              <p:par>
+                                <p:cTn id="17" presetID="1" presetClass="entr" presetSubtype="0" fill="hold" grpId="0" nodeType="clickEffect">
+                                  <p:stCondLst>
+                                    <p:cond delay="0"/>
+                                  </p:stCondLst>
+                                  <p:childTnLst>
+                                    <p:set>
+                                      <p:cBhvr>
+                                        <p:cTn id="18" dur="1" fill="hold">
+                                          <p:stCondLst>
+                                            <p:cond delay="0"/>
+                                          </p:stCondLst>
+                                        </p:cTn>
+                                        <p:tgtEl>
+                                          <p:spTgt spid="7">
+                                            <p:txEl>
+                                              <p:pRg st="6" end="6"/>
+                                            </p:txEl>
+                                          </p:spTgt>
+                                        </p:tgtEl>
+                                        <p:attrNameLst>
+                                          <p:attrName>style.visibility</p:attrName>
+                                        </p:attrNameLst>
+                                      </p:cBhvr>
+                                      <p:to>
+                                        <p:strVal val="visible"/>
+                                      </p:to>
+                                    </p:set>
+                                  </p:childTnLst>
+                                </p:cTn>
+                              </p:par>
+                            </p:childTnLst>
+                          </p:cTn>
+                        </p:par>
+                      </p:childTnLst>
+                    </p:cTn>
+                  </p:par>
+                  <p:par>
+                    <p:cTn id="19" fill="hold">
+                      <p:stCondLst>
+                        <p:cond delay="indefinite"/>
+                      </p:stCondLst>
+                      <p:childTnLst>
+                        <p:par>
+                          <p:cTn id="20" fill="hold">
+                            <p:stCondLst>
+                              <p:cond delay="0"/>
+                            </p:stCondLst>
+                            <p:childTnLst>
+                              <p:par>
+                                <p:cTn id="21" presetID="1" presetClass="entr" presetSubtype="0" fill="hold" grpId="0" nodeType="clickEffect">
+                                  <p:stCondLst>
+                                    <p:cond delay="0"/>
+                                  </p:stCondLst>
+                                  <p:childTnLst>
+                                    <p:set>
+                                      <p:cBhvr>
+                                        <p:cTn id="22" dur="1" fill="hold">
+                                          <p:stCondLst>
+                                            <p:cond delay="0"/>
+                                          </p:stCondLst>
+                                        </p:cTn>
+                                        <p:tgtEl>
+                                          <p:spTgt spid="7">
+                                            <p:txEl>
+                                              <p:pRg st="9" end="9"/>
+                                            </p:txEl>
+                                          </p:spTgt>
+                                        </p:tgtEl>
+                                        <p:attrNameLst>
+                                          <p:attrName>style.visibility</p:attrName>
+                                        </p:attrNameLst>
+                                      </p:cBhvr>
+                                      <p:to>
+                                        <p:strVal val="visible"/>
+                                      </p:to>
+                                    </p:set>
+                                  </p:childTnLst>
+                                </p:cTn>
+                              </p:par>
+                            </p:childTnLst>
+                          </p:cTn>
+                        </p:par>
+                      </p:childTnLst>
+                    </p:cTn>
+                  </p:par>
+                  <p:par>
+                    <p:cTn id="23" fill="hold">
+                      <p:stCondLst>
+                        <p:cond delay="indefinite"/>
+                      </p:stCondLst>
+                      <p:childTnLst>
+                        <p:par>
+                          <p:cTn id="24" fill="hold">
+                            <p:stCondLst>
+                              <p:cond delay="0"/>
+                            </p:stCondLst>
+                            <p:childTnLst>
+                              <p:par>
+                                <p:cTn id="25" presetID="1" presetClass="entr" presetSubtype="0" fill="hold" grpId="0" nodeType="clickEffect">
+                                  <p:stCondLst>
+                                    <p:cond delay="0"/>
+                                  </p:stCondLst>
+                                  <p:childTnLst>
+                                    <p:set>
+                                      <p:cBhvr>
+                                        <p:cTn id="26" dur="1" fill="hold">
+                                          <p:stCondLst>
+                                            <p:cond delay="0"/>
+                                          </p:stCondLst>
+                                        </p:cTn>
+                                        <p:tgtEl>
+                                          <p:spTgt spid="7">
+                                            <p:txEl>
+                                              <p:pRg st="11" end="11"/>
+                                            </p:txEl>
+                                          </p:spTgt>
+                                        </p:tgtEl>
+                                        <p:attrNameLst>
+                                          <p:attrName>style.visibility</p:attrName>
+                                        </p:attrNameLst>
+                                      </p:cBhvr>
+                                      <p:to>
+                                        <p:strVal val="visible"/>
+                                      </p:to>
+                                    </p:set>
+                                  </p:childTnLst>
+                                </p:cTn>
+                              </p:par>
+                            </p:childTnLst>
+                          </p:cTn>
+                        </p:par>
+                      </p:childTnLst>
+                    </p:cTn>
+                  </p:par>
+                  <p:par>
+                    <p:cTn id="27" fill="hold">
+                      <p:stCondLst>
+                        <p:cond delay="indefinite"/>
+                      </p:stCondLst>
+                      <p:childTnLst>
+                        <p:par>
+                          <p:cTn id="28" fill="hold">
+                            <p:stCondLst>
+                              <p:cond delay="0"/>
+                            </p:stCondLst>
+                            <p:childTnLst>
+                              <p:par>
+                                <p:cTn id="29" presetID="1" presetClass="entr" presetSubtype="0" fill="hold" grpId="0" nodeType="clickEffect">
+                                  <p:stCondLst>
+                                    <p:cond delay="0"/>
+                                  </p:stCondLst>
+                                  <p:childTnLst>
+                                    <p:set>
+                                      <p:cBhvr>
+                                        <p:cTn id="30" dur="1" fill="hold">
+                                          <p:stCondLst>
+                                            <p:cond delay="0"/>
+                                          </p:stCondLst>
+                                        </p:cTn>
+                                        <p:tgtEl>
+                                          <p:spTgt spid="7">
+                                            <p:txEl>
+                                              <p:pRg st="13" end="13"/>
+                                            </p:txEl>
+                                          </p:spTgt>
+                                        </p:tgtEl>
+                                        <p:attrNameLst>
+                                          <p:attrName>style.visibility</p:attrName>
+                                        </p:attrNameLst>
+                                      </p:cBhvr>
+                                      <p:to>
+                                        <p:strVal val="visible"/>
+                                      </p:to>
+                                    </p:set>
+                                  </p:childTnLst>
+                                </p:cTn>
+                              </p:par>
+                            </p:childTnLst>
+                          </p:cTn>
+                        </p:par>
+                      </p:childTnLst>
+                    </p:cTn>
+                  </p:par>
+                  <p:par>
+                    <p:cTn id="31" fill="hold">
+                      <p:stCondLst>
+                        <p:cond delay="indefinite"/>
+                      </p:stCondLst>
+                      <p:childTnLst>
+                        <p:par>
+                          <p:cTn id="32" fill="hold">
+                            <p:stCondLst>
+                              <p:cond delay="0"/>
+                            </p:stCondLst>
+                            <p:childTnLst>
+                              <p:par>
+                                <p:cTn id="33" presetID="1" presetClass="entr" presetSubtype="0" fill="hold" grpId="0" nodeType="clickEffect">
+                                  <p:stCondLst>
+                                    <p:cond delay="0"/>
+                                  </p:stCondLst>
+                                  <p:childTnLst>
+                                    <p:set>
+                                      <p:cBhvr>
+                                        <p:cTn id="34" dur="1" fill="hold">
+                                          <p:stCondLst>
+                                            <p:cond delay="0"/>
+                                          </p:stCondLst>
+                                        </p:cTn>
+                                        <p:tgtEl>
+                                          <p:spTgt spid="7">
+                                            <p:txEl>
+                                              <p:pRg st="15" end="15"/>
+                                            </p:txEl>
+                                          </p:spTgt>
+                                        </p:tgtEl>
+                                        <p:attrNameLst>
+                                          <p:attrName>style.visibility</p:attrName>
+                                        </p:attrNameLst>
+                                      </p:cBhvr>
+                                      <p:to>
+                                        <p:strVal val="visible"/>
+                                      </p:to>
+                                    </p:set>
+                                  </p:childTnLst>
+                                </p:cTn>
+                              </p:par>
+                            </p:childTnLst>
+                          </p:cTn>
+                        </p:par>
+                      </p:childTnLst>
+                    </p:cTn>
+                  </p:par>
+                  <p:par>
+                    <p:cTn id="35" fill="hold">
+                      <p:stCondLst>
+                        <p:cond delay="indefinite"/>
+                      </p:stCondLst>
+                      <p:childTnLst>
+                        <p:par>
+                          <p:cTn id="36" fill="hold">
+                            <p:stCondLst>
+                              <p:cond delay="0"/>
+                            </p:stCondLst>
+                            <p:childTnLst>
+                              <p:par>
+                                <p:cTn id="37" presetID="1" presetClass="entr" presetSubtype="0" fill="hold" grpId="0" nodeType="clickEffect">
+                                  <p:stCondLst>
+                                    <p:cond delay="0"/>
+                                  </p:stCondLst>
+                                  <p:childTnLst>
+                                    <p:set>
+                                      <p:cBhvr>
+                                        <p:cTn id="38" dur="1" fill="hold">
+                                          <p:stCondLst>
+                                            <p:cond delay="0"/>
+                                          </p:stCondLst>
+                                        </p:cTn>
+                                        <p:tgtEl>
+                                          <p:spTgt spid="7">
+                                            <p:txEl>
+                                              <p:pRg st="16" end="16"/>
+                                            </p:txEl>
+                                          </p:spTgt>
+                                        </p:tgtEl>
+                                        <p:attrNameLst>
+                                          <p:attrName>style.visibility</p:attrName>
+                                        </p:attrNameLst>
+                                      </p:cBhvr>
+                                      <p:to>
+                                        <p:strVal val="visible"/>
+                                      </p:to>
+                                    </p:set>
+                                  </p:childTnLst>
+                                </p:cTn>
+                              </p:par>
+                            </p:childTnLst>
+                          </p:cTn>
+                        </p:par>
+                      </p:childTnLst>
+                    </p:cTn>
+                  </p:par>
+                </p:childTnLst>
+              </p:cTn>
+              <p:prevCondLst>
+                <p:cond evt="onPrev" delay="0">
+                  <p:tgtEl>
+                    <p:sldTgt/>
+                  </p:tgtEl>
+                </p:cond>
+              </p:prevCondLst>
+              <p:nextCondLst>
+                <p:cond evt="onNext" delay="0">
+                  <p:tgtEl>
+                    <p:sldTgt/>
+                  </p:tgtEl>
+                </p:cond>
+              </p:nextCondLst>
+            </p:seq>
+          </p:childTnLst>
+        </p:cTn>
+      </p:par>
+    </p:tnLst>
+    <p:bldLst>
+      <p:bldP spid="7" grpId="0" build="p"/>
+    </p:bldLst>
+  </p:timing>
 </p:sld>
 </file>
 
@@ -10157,6 +11543,81 @@
   <p:clrMapOvr>
     <a:masterClrMapping/>
   </p:clrMapOvr>
+  <p:timing>
+    <p:tnLst>
+      <p:par>
+        <p:cTn id="1" dur="indefinite" restart="never" nodeType="tmRoot">
+          <p:childTnLst>
+            <p:seq concurrent="1" nextAc="seek">
+              <p:cTn id="2" dur="indefinite" nodeType="mainSeq">
+                <p:childTnLst>
+                  <p:par>
+                    <p:cTn id="3" fill="hold">
+                      <p:stCondLst>
+                        <p:cond delay="indefinite"/>
+                      </p:stCondLst>
+                      <p:childTnLst>
+                        <p:par>
+                          <p:cTn id="4" fill="hold">
+                            <p:stCondLst>
+                              <p:cond delay="0"/>
+                            </p:stCondLst>
+                            <p:childTnLst>
+                              <p:par>
+                                <p:cTn id="5" presetID="1" presetClass="entr" presetSubtype="0" fill="hold" nodeType="clickEffect">
+                                  <p:stCondLst>
+                                    <p:cond delay="0"/>
+                                  </p:stCondLst>
+                                  <p:childTnLst>
+                                    <p:set>
+                                      <p:cBhvr>
+                                        <p:cTn id="6" dur="1" fill="hold">
+                                          <p:stCondLst>
+                                            <p:cond delay="0"/>
+                                          </p:stCondLst>
+                                        </p:cTn>
+                                        <p:tgtEl>
+                                          <p:spTgt spid="30"/>
+                                        </p:tgtEl>
+                                        <p:attrNameLst>
+                                          <p:attrName>style.visibility</p:attrName>
+                                        </p:attrNameLst>
+                                      </p:cBhvr>
+                                      <p:to>
+                                        <p:strVal val="visible"/>
+                                      </p:to>
+                                    </p:set>
+                                  </p:childTnLst>
+                                </p:cTn>
+                              </p:par>
+                            </p:childTnLst>
+                          </p:cTn>
+                        </p:par>
+                      </p:childTnLst>
+                    </p:cTn>
+                  </p:par>
+                </p:childTnLst>
+              </p:cTn>
+              <p:prevCondLst>
+                <p:cond evt="onPrev" delay="0">
+                  <p:tgtEl>
+                    <p:sldTgt/>
+                  </p:tgtEl>
+                </p:cond>
+              </p:prevCondLst>
+              <p:nextCondLst>
+                <p:cond evt="onNext" delay="0">
+                  <p:tgtEl>
+                    <p:sldTgt/>
+                  </p:tgtEl>
+                </p:cond>
+              </p:nextCondLst>
+            </p:seq>
+          </p:childTnLst>
+        </p:cTn>
+      </p:par>
+    </p:tnLst>
+  </p:timing>
 </p:sld>
 </file>
 
@@ -11245,6 +12706,157 @@
   <p:clrMapOvr>
     <a:masterClrMapping/>
   </p:clrMapOvr>
+  <p:timing>
+    <p:tnLst>
+      <p:par>
+        <p:cTn id="1" dur="indefinite" restart="never" nodeType="tmRoot">
+          <p:childTnLst>
+            <p:seq concurrent="1" nextAc="seek">
+              <p:cTn id="2" dur="indefinite" nodeType="mainSeq">
+                <p:childTnLst>
+                  <p:par>
+                    <p:cTn id="3" fill="hold">
+                      <p:stCondLst>
+                        <p:cond delay="indefinite"/>
+                      </p:stCondLst>
+                      <p:childTnLst>
+                        <p:par>
+                          <p:cTn id="4" fill="hold">
+                            <p:stCondLst>
+                              <p:cond delay="0"/>
+                            </p:stCondLst>
+                            <p:childTnLst>
+                              <p:par>
+                                <p:cTn id="5" presetID="1" presetClass="entr" presetSubtype="0" fill="hold" grpId="0" nodeType="clickEffect">
+                                  <p:stCondLst>
+                                    <p:cond delay="0"/>
+                                  </p:stCondLst>
+                                  <p:childTnLst>
+                                    <p:set>
+                                      <p:cBhvr>
+                                        <p:cTn id="6" dur="1" fill="hold">
+                                          <p:stCondLst>
+                                            <p:cond delay="0"/>
+                                          </p:stCondLst>
+                                        </p:cTn>
+                                        <p:tgtEl>
+                                          <p:spTgt spid="2"/>
+                                        </p:tgtEl>
+                                        <p:attrNameLst>
+                                          <p:attrName>style.visibility</p:attrName>
+                                        </p:attrNameLst>
+                                      </p:cBhvr>
+                                      <p:to>
+                                        <p:strVal val="visible"/>
+                                      </p:to>
+                                    </p:set>
+                                  </p:childTnLst>
+                                </p:cTn>
+                              </p:par>
+                            </p:childTnLst>
+                          </p:cTn>
+                        </p:par>
+                      </p:childTnLst>
+                    </p:cTn>
+                  </p:par>
+                  <p:par>
+                    <p:cTn id="7" fill="hold">
+                      <p:stCondLst>
+                        <p:cond delay="indefinite"/>
+                      </p:stCondLst>
+                      <p:childTnLst>
+                        <p:par>
+                          <p:cTn id="8" fill="hold">
+                            <p:stCondLst>
+                              <p:cond delay="0"/>
+                            </p:stCondLst>
+                            <p:childTnLst>
+                              <p:par>
+                                <p:cTn id="9" presetID="1" presetClass="entr" presetSubtype="0" fill="hold" grpId="0" nodeType="clickEffect">
+                                  <p:stCondLst>
+                                    <p:cond delay="0"/>
+                                  </p:stCondLst>
+                                  <p:childTnLst>
+                                    <p:set>
+                                      <p:cBhvr>
+                                        <p:cTn id="10" dur="1" fill="hold">
+                                          <p:stCondLst>
+                                            <p:cond delay="0"/>
+                                          </p:stCondLst>
+                                        </p:cTn>
+                                        <p:tgtEl>
+                                          <p:spTgt spid="9"/>
+                                        </p:tgtEl>
+                                        <p:attrNameLst>
+                                          <p:attrName>style.visibility</p:attrName>
+                                        </p:attrNameLst>
+                                      </p:cBhvr>
+                                      <p:to>
+                                        <p:strVal val="visible"/>
+                                      </p:to>
+                                    </p:set>
+                                  </p:childTnLst>
+                                </p:cTn>
+                              </p:par>
+                              <p:par>
+                                <p:cTn id="11" presetID="1" presetClass="entr" presetSubtype="0" fill="hold" nodeType="withEffect">
+                                  <p:stCondLst>
+                                    <p:cond delay="0"/>
+                                  </p:stCondLst>
+                                  <p:childTnLst>
+                                    <p:set>
+                                      <p:cBhvr>
+                                        <p:cTn id="12" dur="1" fill="hold">
+                                          <p:stCondLst>
+                                            <p:cond delay="0"/>
+                                          </p:stCondLst>
+                                        </p:cTn>
+                                        <p:tgtEl>
+                                          <p:spTgt spid="8"/>
+                                        </p:tgtEl>
+                                        <p:attrNameLst>
+                                          <p:attrName>style.visibility</p:attrName>
+                                        </p:attrNameLst>
+                                      </p:cBhvr>
+                                      <p:to>
+                                        <p:strVal val="visible"/>
+                                      </p:to>
+                                    </p:set>
+                                  </p:childTnLst>
+                                </p:cTn>
+                              </p:par>
+                            </p:childTnLst>
+                          </p:cTn>
+                        </p:par>
+                      </p:childTnLst>
+                    </p:cTn>
+                  </p:par>
+                </p:childTnLst>
+              </p:cTn>
+              <p:prevCondLst>
+                <p:cond evt="onPrev" delay="0">
+                  <p:tgtEl>
+                    <p:sldTgt/>
+                  </p:tgtEl>
+                </p:cond>
+              </p:prevCondLst>
+              <p:nextCondLst>
+                <p:cond evt="onNext" delay="0">
+                  <p:tgtEl>
+                    <p:sldTgt/>
+                  </p:tgtEl>
+                </p:cond>
+              </p:nextCondLst>
+            </p:seq>
+          </p:childTnLst>
+        </p:cTn>
+      </p:par>
+    </p:tnLst>
+    <p:bldLst>
+      <p:bldP spid="2" grpId="0"/>
+      <p:bldP spid="9" grpId="0"/>
+    </p:bldLst>
+  </p:timing>
 </p:sld>
 </file>
 
@@ -11913,6 +13525,176 @@
   <p:clrMapOvr>
     <a:masterClrMapping/>
   </p:clrMapOvr>
+  <p:timing>
+    <p:tnLst>
+      <p:par>
+        <p:cTn id="1" dur="indefinite" restart="never" nodeType="tmRoot">
+          <p:childTnLst>
+            <p:seq concurrent="1" nextAc="seek">
+              <p:cTn id="2" dur="indefinite" nodeType="mainSeq">
+                <p:childTnLst>
+                  <p:par>
+                    <p:cTn id="3" fill="hold">
+                      <p:stCondLst>
+                        <p:cond delay="indefinite"/>
+                      </p:stCondLst>
+                      <p:childTnLst>
+                        <p:par>
+                          <p:cTn id="4" fill="hold">
+                            <p:stCondLst>
+                              <p:cond delay="0"/>
+                            </p:stCondLst>
+                            <p:childTnLst>
+                              <p:par>
+                                <p:cTn id="5" presetID="1" presetClass="entr" presetSubtype="0" fill="hold" grpId="0" nodeType="clickEffect">
+                                  <p:stCondLst>
+                                    <p:cond delay="0"/>
+                                  </p:stCondLst>
+                                  <p:childTnLst>
+                                    <p:set>
+                                      <p:cBhvr>
+                                        <p:cTn id="6" dur="1" fill="hold">
+                                          <p:stCondLst>
+                                            <p:cond delay="0"/>
+                                          </p:stCondLst>
+                                        </p:cTn>
+                                        <p:tgtEl>
+                                          <p:spTgt spid="3"/>
+                                        </p:tgtEl>
+                                        <p:attrNameLst>
+                                          <p:attrName>style.visibility</p:attrName>
+                                        </p:attrNameLst>
+                                      </p:cBhvr>
+                                      <p:to>
+                                        <p:strVal val="visible"/>
+                                      </p:to>
+                                    </p:set>
+                                  </p:childTnLst>
+                                </p:cTn>
+                              </p:par>
+                            </p:childTnLst>
+                          </p:cTn>
+                        </p:par>
+                      </p:childTnLst>
+                    </p:cTn>
+                  </p:par>
+                  <p:par>
+                    <p:cTn id="7" fill="hold">
+                      <p:stCondLst>
+                        <p:cond delay="indefinite"/>
+                      </p:stCondLst>
+                      <p:childTnLst>
+                        <p:par>
+                          <p:cTn id="8" fill="hold">
+                            <p:stCondLst>
+                              <p:cond delay="0"/>
+                            </p:stCondLst>
+                            <p:childTnLst>
+                              <p:par>
+                                <p:cTn id="9" presetID="1" presetClass="entr" presetSubtype="0" fill="hold" grpId="0" nodeType="clickEffect">
+                                  <p:stCondLst>
+                                    <p:cond delay="0"/>
+                                  </p:stCondLst>
+                                  <p:childTnLst>
+                                    <p:set>
+                                      <p:cBhvr>
+                                        <p:cTn id="10" dur="1" fill="hold">
+                                          <p:stCondLst>
+                                            <p:cond delay="0"/>
+                                          </p:stCondLst>
+                                        </p:cTn>
+                                        <p:tgtEl>
+                                          <p:spTgt spid="10"/>
+                                        </p:tgtEl>
+                                        <p:attrNameLst>
+                                          <p:attrName>style.visibility</p:attrName>
+                                        </p:attrNameLst>
+                                      </p:cBhvr>
+                                      <p:to>
+                                        <p:strVal val="visible"/>
+                                      </p:to>
+                                    </p:set>
+                                  </p:childTnLst>
+                                </p:cTn>
+                              </p:par>
+                            </p:childTnLst>
+                          </p:cTn>
+                        </p:par>
+                      </p:childTnLst>
+                    </p:cTn>
+                  </p:par>
+                  <p:par>
+                    <p:cTn id="11" fill="hold">
+                      <p:stCondLst>
+                        <p:cond delay="indefinite"/>
+                      </p:stCondLst>
+                      <p:childTnLst>
+                        <p:par>
+                          <p:cTn id="12" fill="hold">
+                            <p:stCondLst>
+                              <p:cond delay="0"/>
+                            </p:stCondLst>
+                            <p:childTnLst>
+                              <p:par>
+                                <p:cTn id="13" presetID="1" presetClass="entr" presetSubtype="0" fill="hold" grpId="0" nodeType="clickEffect">
+                                  <p:stCondLst>
+                                    <p:cond delay="0"/>
+                                  </p:stCondLst>
+                                  <p:childTnLst>
+                                    <p:set>
+                                      <p:cBhvr>
+                                        <p:cTn id="14" dur="1" fill="hold">
+                                          <p:stCondLst>
+                                            <p:cond delay="0"/>
+                                          </p:stCondLst>
+                                        </p:cTn>
+                                        <p:tgtEl>
+                                          <p:spTgt spid="11"/>
+                                        </p:tgtEl>
+                                        <p:attrNameLst>
+                                          <p:attrName>style.visibility</p:attrName>
+                                        </p:attrNameLst>
+                                      </p:cBhvr>
+                                      <p:to>
+                                        <p:strVal val="visible"/>
+                                      </p:to>
+                                    </p:set>
+                                  </p:childTnLst>
+                                </p:cTn>
+                              </p:par>
+                            </p:childTnLst>
+                          </p:cTn>
+                        </p:par>
+                      </p:childTnLst>
+                    </p:cTn>
+                  </p:par>
+                </p:childTnLst>
+              </p:cTn>
+              <p:prevCondLst>
+                <p:cond evt="onPrev" delay="0">
+                  <p:tgtEl>
+                    <p:sldTgt/>
+                  </p:tgtEl>
+                </p:cond>
+              </p:prevCondLst>
+              <p:nextCondLst>
+                <p:cond evt="onNext" delay="0">
+                  <p:tgtEl>
+                    <p:sldTgt/>
+                  </p:tgtEl>
+                </p:cond>
+              </p:nextCondLst>
+            </p:seq>
+          </p:childTnLst>
+        </p:cTn>
+      </p:par>
+    </p:tnLst>
+    <p:bldLst>
+      <p:bldP spid="3" grpId="0"/>
+      <p:bldP spid="10" grpId="0"/>
+      <p:bldP spid="11" grpId="0"/>
+    </p:bldLst>
+  </p:timing>
 </p:sld>
 </file>
 
@@ -12684,6 +14466,130 @@
   <p:clrMapOvr>
     <a:masterClrMapping/>
   </p:clrMapOvr>
+  <p:timing>
+    <p:tnLst>
+      <p:par>
+        <p:cTn id="1" dur="indefinite" restart="never" nodeType="tmRoot">
+          <p:childTnLst>
+            <p:seq concurrent="1" nextAc="seek">
+              <p:cTn id="2" dur="indefinite" nodeType="mainSeq">
+                <p:childTnLst>
+                  <p:par>
+                    <p:cTn id="3" fill="hold">
+                      <p:stCondLst>
+                        <p:cond delay="indefinite"/>
+                      </p:stCondLst>
+                      <p:childTnLst>
+                        <p:par>
+                          <p:cTn id="4" fill="hold">
+                            <p:stCondLst>
+                              <p:cond delay="0"/>
+                            </p:stCondLst>
+                            <p:childTnLst>
+                              <p:par>
+                                <p:cTn id="5" presetID="1" presetClass="entr" presetSubtype="0" fill="hold" grpId="0" nodeType="clickEffect">
+                                  <p:stCondLst>
+                                    <p:cond delay="0"/>
+                                  </p:stCondLst>
+                                  <p:childTnLst>
+                                    <p:set>
+                                      <p:cBhvr>
+                                        <p:cTn id="6" dur="1" fill="hold">
+                                          <p:stCondLst>
+                                            <p:cond delay="0"/>
+                                          </p:stCondLst>
+                                        </p:cTn>
+                                        <p:tgtEl>
+                                          <p:spTgt spid="2"/>
+                                        </p:tgtEl>
+                                        <p:attrNameLst>
+                                          <p:attrName>style.visibility</p:attrName>
+                                        </p:attrNameLst>
+                                      </p:cBhvr>
+                                      <p:to>
+                                        <p:strVal val="visible"/>
+                                      </p:to>
+                                    </p:set>
+                                  </p:childTnLst>
+                                </p:cTn>
+                              </p:par>
+                            </p:childTnLst>
+                          </p:cTn>
+                        </p:par>
+                      </p:childTnLst>
+                    </p:cTn>
+                  </p:par>
+                  <p:par>
+                    <p:cTn id="7" fill="hold">
+                      <p:stCondLst>
+                        <p:cond delay="indefinite"/>
+                      </p:stCondLst>
+                      <p:childTnLst>
+                        <p:par>
+                          <p:cTn id="8" fill="hold">
+                            <p:stCondLst>
+                              <p:cond delay="0"/>
+                            </p:stCondLst>
+                            <p:childTnLst>
+                              <p:par>
+                                <p:cTn id="9" presetID="1" presetClass="entr" presetSubtype="0" fill="hold" grpId="0" nodeType="clickEffect">
+                                  <p:stCondLst>
+                                    <p:cond delay="0"/>
+                                  </p:stCondLst>
+                                  <p:childTnLst>
+                                    <p:set>
+                                      <p:cBhvr>
+                                        <p:cTn id="10" dur="1" fill="hold">
+                                          <p:stCondLst>
+                                            <p:cond delay="0"/>
+                                          </p:stCondLst>
+                                        </p:cTn>
+                                        <p:tgtEl>
+                                          <p:spTgt spid="8"/>
+                                        </p:tgtEl>
+                                        <p:attrNameLst>
+                                          <p:attrName>style.visibility</p:attrName>
+                                        </p:attrNameLst>
+                                      </p:cBhvr>
+                                      <p:to>
+                                        <p:strVal val="visible"/>
+                                      </p:to>
+                                    </p:set>
+                                  </p:childTnLst>
+                                </p:cTn>
+                              </p:par>
+                            </p:childTnLst>
+                          </p:cTn>
+                        </p:par>
+                      </p:childTnLst>
+                    </p:cTn>
+                  </p:par>
+                </p:childTnLst>
+              </p:cTn>
+              <p:prevCondLst>
+                <p:cond evt="onPrev" delay="0">
+                  <p:tgtEl>
+                    <p:sldTgt/>
+                  </p:tgtEl>
+                </p:cond>
+              </p:prevCondLst>
+              <p:nextCondLst>
+                <p:cond evt="onNext" delay="0">
+                  <p:tgtEl>
+                    <p:sldTgt/>
+                  </p:tgtEl>
+                </p:cond>
+              </p:nextCondLst>
+            </p:seq>
+          </p:childTnLst>
+        </p:cTn>
+      </p:par>
+    </p:tnLst>
+    <p:bldLst>
+      <p:bldP spid="2" grpId="0"/>
+      <p:bldP spid="8" grpId="0"/>
+    </p:bldLst>
+  </p:timing>
 </p:sld>
 </file>
 
@@ -13674,6 +15580,250 @@
   <p:clrMapOvr>
     <a:masterClrMapping/>
   </p:clrMapOvr>
+  <p:timing>
+    <p:tnLst>
+      <p:par>
+        <p:cTn id="1" dur="indefinite" restart="never" nodeType="tmRoot">
+          <p:childTnLst>
+            <p:seq concurrent="1" nextAc="seek">
+              <p:cTn id="2" dur="indefinite" nodeType="mainSeq">
+                <p:childTnLst>
+                  <p:par>
+                    <p:cTn id="3" fill="hold">
+                      <p:stCondLst>
+                        <p:cond delay="indefinite"/>
+                      </p:stCondLst>
+                      <p:childTnLst>
+                        <p:par>
+                          <p:cTn id="4" fill="hold">
+                            <p:stCondLst>
+                              <p:cond delay="0"/>
+                            </p:stCondLst>
+                            <p:childTnLst>
+                              <p:par>
+                                <p:cTn id="5" presetID="1" presetClass="entr" presetSubtype="0" fill="hold" nodeType="clickEffect">
+                                  <p:stCondLst>
+                                    <p:cond delay="0"/>
+                                  </p:stCondLst>
+                                  <p:childTnLst>
+                                    <p:set>
+                                      <p:cBhvr>
+                                        <p:cTn id="6" dur="1" fill="hold">
+                                          <p:stCondLst>
+                                            <p:cond delay="0"/>
+                                          </p:stCondLst>
+                                        </p:cTn>
+                                        <p:tgtEl>
+                                          <p:spTgt spid="19"/>
+                                        </p:tgtEl>
+                                        <p:attrNameLst>
+                                          <p:attrName>style.visibility</p:attrName>
+                                        </p:attrNameLst>
+                                      </p:cBhvr>
+                                      <p:to>
+                                        <p:strVal val="visible"/>
+                                      </p:to>
+                                    </p:set>
+                                  </p:childTnLst>
+                                </p:cTn>
+                              </p:par>
+                              <p:par>
+                                <p:cTn id="7" presetID="1" presetClass="entr" presetSubtype="0" fill="hold" nodeType="withEffect">
+                                  <p:stCondLst>
+                                    <p:cond delay="0"/>
+                                  </p:stCondLst>
+                                  <p:childTnLst>
+                                    <p:set>
+                                      <p:cBhvr>
+                                        <p:cTn id="8" dur="1" fill="hold">
+                                          <p:stCondLst>
+                                            <p:cond delay="0"/>
+                                          </p:stCondLst>
+                                        </p:cTn>
+                                        <p:tgtEl>
+                                          <p:spTgt spid="20"/>
+                                        </p:tgtEl>
+                                        <p:attrNameLst>
+                                          <p:attrName>style.visibility</p:attrName>
+                                        </p:attrNameLst>
+                                      </p:cBhvr>
+                                      <p:to>
+                                        <p:strVal val="visible"/>
+                                      </p:to>
+                                    </p:set>
+                                  </p:childTnLst>
+                                </p:cTn>
+                              </p:par>
+                              <p:par>
+                                <p:cTn id="9" presetID="1" presetClass="entr" presetSubtype="0" fill="hold" grpId="0" nodeType="withEffect">
+                                  <p:stCondLst>
+                                    <p:cond delay="0"/>
+                                  </p:stCondLst>
+                                  <p:childTnLst>
+                                    <p:set>
+                                      <p:cBhvr>
+                                        <p:cTn id="10" dur="1" fill="hold">
+                                          <p:stCondLst>
+                                            <p:cond delay="0"/>
+                                          </p:stCondLst>
+                                        </p:cTn>
+                                        <p:tgtEl>
+                                          <p:spTgt spid="22"/>
+                                        </p:tgtEl>
+                                        <p:attrNameLst>
+                                          <p:attrName>style.visibility</p:attrName>
+                                        </p:attrNameLst>
+                                      </p:cBhvr>
+                                      <p:to>
+                                        <p:strVal val="visible"/>
+                                      </p:to>
+                                    </p:set>
+                                  </p:childTnLst>
+                                </p:cTn>
+                              </p:par>
+                              <p:par>
+                                <p:cTn id="11" presetID="1" presetClass="entr" presetSubtype="0" fill="hold" grpId="0" nodeType="withEffect">
+                                  <p:stCondLst>
+                                    <p:cond delay="0"/>
+                                  </p:stCondLst>
+                                  <p:childTnLst>
+                                    <p:set>
+                                      <p:cBhvr>
+                                        <p:cTn id="12" dur="1" fill="hold">
+                                          <p:stCondLst>
+                                            <p:cond delay="0"/>
+                                          </p:stCondLst>
+                                        </p:cTn>
+                                        <p:tgtEl>
+                                          <p:spTgt spid="23"/>
+                                        </p:tgtEl>
+                                        <p:attrNameLst>
+                                          <p:attrName>style.visibility</p:attrName>
+                                        </p:attrNameLst>
+                                      </p:cBhvr>
+                                      <p:to>
+                                        <p:strVal val="visible"/>
+                                      </p:to>
+                                    </p:set>
+                                  </p:childTnLst>
+                                </p:cTn>
+                              </p:par>
+                              <p:par>
+                                <p:cTn id="13" presetID="1" presetClass="entr" presetSubtype="0" fill="hold" grpId="0" nodeType="withEffect">
+                                  <p:stCondLst>
+                                    <p:cond delay="0"/>
+                                  </p:stCondLst>
+                                  <p:childTnLst>
+                                    <p:set>
+                                      <p:cBhvr>
+                                        <p:cTn id="14" dur="1" fill="hold">
+                                          <p:stCondLst>
+                                            <p:cond delay="0"/>
+                                          </p:stCondLst>
+                                        </p:cTn>
+                                        <p:tgtEl>
+                                          <p:spTgt spid="24"/>
+                                        </p:tgtEl>
+                                        <p:attrNameLst>
+                                          <p:attrName>style.visibility</p:attrName>
+                                        </p:attrNameLst>
+                                      </p:cBhvr>
+                                      <p:to>
+                                        <p:strVal val="visible"/>
+                                      </p:to>
+                                    </p:set>
+                                  </p:childTnLst>
+                                </p:cTn>
+                              </p:par>
+                              <p:par>
+                                <p:cTn id="15" presetID="1" presetClass="entr" presetSubtype="0" fill="hold" grpId="0" nodeType="withEffect">
+                                  <p:stCondLst>
+                                    <p:cond delay="0"/>
+                                  </p:stCondLst>
+                                  <p:childTnLst>
+                                    <p:set>
+                                      <p:cBhvr>
+                                        <p:cTn id="16" dur="1" fill="hold">
+                                          <p:stCondLst>
+                                            <p:cond delay="0"/>
+                                          </p:stCondLst>
+                                        </p:cTn>
+                                        <p:tgtEl>
+                                          <p:spTgt spid="25"/>
+                                        </p:tgtEl>
+                                        <p:attrNameLst>
+                                          <p:attrName>style.visibility</p:attrName>
+                                        </p:attrNameLst>
+                                      </p:cBhvr>
+                                      <p:to>
+                                        <p:strVal val="visible"/>
+                                      </p:to>
+                                    </p:set>
+                                  </p:childTnLst>
+                                </p:cTn>
+                              </p:par>
+                              <p:par>
+                                <p:cTn id="17" presetID="1" presetClass="entr" presetSubtype="0" fill="hold" grpId="0" nodeType="withEffect">
+                                  <p:stCondLst>
+                                    <p:cond delay="0"/>
+                                  </p:stCondLst>
+                                  <p:childTnLst>
+                                    <p:set>
+                                      <p:cBhvr>
+                                        <p:cTn id="18" dur="1" fill="hold">
+                                          <p:stCondLst>
+                                            <p:cond delay="0"/>
+                                          </p:stCondLst>
+                                        </p:cTn>
+                                        <p:tgtEl>
+                                          <p:spTgt spid="30"/>
+                                        </p:tgtEl>
+                                        <p:attrNameLst>
+                                          <p:attrName>style.visibility</p:attrName>
+                                        </p:attrNameLst>
+                                      </p:cBhvr>
+                                      <p:to>
+                                        <p:strVal val="visible"/>
+                                      </p:to>
+                                    </p:set>
+                                  </p:childTnLst>
+                                </p:cTn>
+                              </p:par>
+                            </p:childTnLst>
+                          </p:cTn>
+                        </p:par>
+                      </p:childTnLst>
+                    </p:cTn>
+                  </p:par>
+                </p:childTnLst>
+              </p:cTn>
+              <p:prevCondLst>
+                <p:cond evt="onPrev" delay="0">
+                  <p:tgtEl>
+                    <p:sldTgt/>
+                  </p:tgtEl>
+                </p:cond>
+              </p:prevCondLst>
+              <p:nextCondLst>
+                <p:cond evt="onNext" delay="0">
+                  <p:tgtEl>
+                    <p:sldTgt/>
+                  </p:tgtEl>
+                </p:cond>
+              </p:nextCondLst>
+            </p:seq>
+          </p:childTnLst>
+        </p:cTn>
+      </p:par>
+    </p:tnLst>
+    <p:bldLst>
+      <p:bldP spid="22" grpId="0" animBg="1"/>
+      <p:bldP spid="23" grpId="0" animBg="1"/>
+      <p:bldP spid="24" grpId="0" animBg="1"/>
+      <p:bldP spid="25" grpId="0" animBg="1"/>
+      <p:bldP spid="30" grpId="0"/>
+    </p:bldLst>
+  </p:timing>
 </p:sld>
 </file>
 
@@ -14205,6 +16355,84 @@
   <p:clrMapOvr>
     <a:masterClrMapping/>
   </p:clrMapOvr>
+  <p:timing>
+    <p:tnLst>
+      <p:par>
+        <p:cTn id="1" dur="indefinite" restart="never" nodeType="tmRoot">
+          <p:childTnLst>
+            <p:seq concurrent="1" nextAc="seek">
+              <p:cTn id="2" dur="indefinite" nodeType="mainSeq">
+                <p:childTnLst>
+                  <p:par>
+                    <p:cTn id="3" fill="hold">
+                      <p:stCondLst>
+                        <p:cond delay="indefinite"/>
+                      </p:stCondLst>
+                      <p:childTnLst>
+                        <p:par>
+                          <p:cTn id="4" fill="hold">
+                            <p:stCondLst>
+                              <p:cond delay="0"/>
+                            </p:stCondLst>
+                            <p:childTnLst>
+                              <p:par>
+                                <p:cTn id="5" presetID="1" presetClass="entr" presetSubtype="0" fill="hold" grpId="0" nodeType="clickEffect">
+                                  <p:stCondLst>
+                                    <p:cond delay="0"/>
+                                  </p:stCondLst>
+                                  <p:childTnLst>
+                                    <p:set>
+                                      <p:cBhvr>
+                                        <p:cTn id="6" dur="1" fill="hold">
+                                          <p:stCondLst>
+                                            <p:cond delay="0"/>
+                                          </p:stCondLst>
+                                        </p:cTn>
+                                        <p:tgtEl>
+                                          <p:spTgt spid="17"/>
+                                        </p:tgtEl>
+                                        <p:attrNameLst>
+                                          <p:attrName>style.visibility</p:attrName>
+                                        </p:attrNameLst>
+                                      </p:cBhvr>
+                                      <p:to>
+                                        <p:strVal val="visible"/>
+                                      </p:to>
+                                    </p:set>
+                                  </p:childTnLst>
+                                </p:cTn>
+                              </p:par>
+                            </p:childTnLst>
+                          </p:cTn>
+                        </p:par>
+                      </p:childTnLst>
+                    </p:cTn>
+                  </p:par>
+                </p:childTnLst>
+              </p:cTn>
+              <p:prevCondLst>
+                <p:cond evt="onPrev" delay="0">
+                  <p:tgtEl>
+                    <p:sldTgt/>
+                  </p:tgtEl>
+                </p:cond>
+              </p:prevCondLst>
+              <p:nextCondLst>
+                <p:cond evt="onNext" delay="0">
+                  <p:tgtEl>
+                    <p:sldTgt/>
+                  </p:tgtEl>
+                </p:cond>
+              </p:nextCondLst>
+            </p:seq>
+          </p:childTnLst>
+        </p:cTn>
+      </p:par>
+    </p:tnLst>
+    <p:bldLst>
+      <p:bldP spid="17" grpId="0"/>
+    </p:bldLst>
+  </p:timing>
 </p:sld>
 </file>
 
